--- a/Campus_Ballot_Report.pptx
+++ b/Campus_Ballot_Report.pptx
@@ -14993,10 +14993,10 @@
       </p:grpSpPr>
       <p:pic>
         <p:nvPicPr>
-          <p:cNvPr id="2" name="Picture 1">
+          <p:cNvPr id="4" name="Picture 3">
             <a:extLst>
               <a:ext uri="{FF2B5EF4-FFF2-40B4-BE49-F238E27FC236}">
-                <a16:creationId xmlns:a16="http://schemas.microsoft.com/office/drawing/2014/main" id="{1DEA18EF-953F-7532-CB42-5A7FBDCB2EC4}"/>
+                <a16:creationId xmlns:a16="http://schemas.microsoft.com/office/drawing/2014/main" id="{8539F4A7-4F6B-1ED9-960C-0FF3994BA2CA}"/>
               </a:ext>
             </a:extLst>
           </p:cNvPr>
@@ -15013,8 +15013,8 @@
         </p:blipFill>
         <p:spPr>
           <a:xfrm>
-            <a:off x="1571624" y="8788"/>
-            <a:ext cx="9060375" cy="6849212"/>
+            <a:off x="3252859" y="0"/>
+            <a:ext cx="5686281" cy="6858000"/>
           </a:xfrm>
           <a:prstGeom prst="rect">
             <a:avLst/>
